--- a/decks/hist-renaissance-medicine/hist-renaissance-medicine_ch6_great-plague.pptx
+++ b/decks/hist-renaissance-medicine/hist-renaissance-medicine_ch6_great-plague.pptx
@@ -128,30 +128,30 @@
   <p:extLst>
     <p:ext uri="{521415D9-36F7-43E2-AB2F-B90AF26B5E84}">
       <p14:sectionLst xmlns:p14="http://schemas.microsoft.com/office/powerpoint/2010/main">
-        <p14:section name="Opening" id="{95aab778-4aa4-d4d0-e300-4254083cede6}">
+        <p14:section name="Opening" id="{9eee9efb-f950-b5f2-33f4-e31d65e66e50}">
           <p14:sldIdLst>
             <p14:sldId id="256"/>
           </p14:sldIdLst>
         </p14:section>
-        <p14:section name="Gate" id="{b5769bde-cc3e-2be2-8af3-997437f312cd}">
+        <p14:section name="Gate" id="{542d4295-dcf6-8dde-45a9-367b7481d4de}">
           <p14:sldIdLst>
             <p14:sldId id="257"/>
             <p14:sldId id="258"/>
           </p14:sldIdLst>
         </p14:section>
-        <p14:section name="Pre-teach" id="{ecdc130d-709f-63f1-5bdb-6f737410287b}">
+        <p14:section name="Pre-teach" id="{e9512c39-c957-4d90-4750-956ce6fcdb11}">
           <p14:sldIdLst>
             <p14:sldId id="259"/>
             <p14:sldId id="260"/>
           </p14:sldIdLst>
         </p14:section>
-        <p14:section name="Read-along" id="{cda8f57c-5354-7d5b-0a5f-b22792e11152}">
+        <p14:section name="Read-along" id="{477ffdf6-9caa-ee97-a13f-dce4c09164b5}">
           <p14:sldIdLst>
             <p14:sldId id="261"/>
             <p14:sldId id="262"/>
           </p14:sldIdLst>
         </p14:section>
-        <p14:section name="Teach" id="{80400bde-0150-1b78-6e84-fa45df334148}">
+        <p14:section name="Teach" id="{178a810c-230d-3c45-edef-6dda8afc86d7}">
           <p14:sldIdLst>
             <p14:sldId id="263"/>
             <p14:sldId id="264"/>
@@ -163,19 +163,19 @@
             <p14:sldId id="270"/>
           </p14:sldIdLst>
         </p14:section>
-        <p14:section name="Routes" id="{d59a9ca9-bb01-5285-cb32-d1079485d14b}">
+        <p14:section name="Routes" id="{3d6fede9-27c3-7b5a-0f37-c7eb90c93aae}">
           <p14:sldIdLst>
             <p14:sldId id="271"/>
             <p14:sldId id="272"/>
             <p14:sldId id="273"/>
           </p14:sldIdLst>
         </p14:section>
-        <p14:section name="Close" id="{edc63e4e-f9c7-2732-3f92-f07e96e4087b}">
+        <p14:section name="Close" id="{a5767900-3a7f-f97f-0a49-03a7638b8bb5}">
           <p14:sldIdLst>
             <p14:sldId id="274"/>
           </p14:sldIdLst>
         </p14:section>
-        <p14:section name="Answers" id="{8a96fb22-3da3-f166-6d39-8e9b3d253c40}">
+        <p14:section name="Answers" id="{1c4446bf-3938-156f-e532-ccd72d6a2d43}">
           <p14:sldIdLst>
             <p14:sldId id="275"/>
             <p14:sldId id="276"/>
@@ -2443,7 +2443,7 @@
               <a:rPr lang="en-US" dirty="0"/>
               <a:t>Teach — The plague never really left. Say it in your own words, then check understanding with a quick question: ask a pupil from the pre-teach group first, since they met these words and ideas before the lesson. Pupils try to recall before you re-explain.
 The Black Death of 1348 is in your last unit; this is its sequel. The disease did not go away afterwards. For the next three hundred years there were local and regional outbreaks, year after year, without ever again becoming a national disaster on that scale. London was hit hard in 1603 and again in 1625. Then, between June and November 1665, came the second great outbreak in English history, known as the Great Plague.
-The figures your lesson gives are these. At the peak of the outbreak, 7,000 people a week were dying. In London over 100,000 people died, which was about a fifth of the city's population. For comparison, conservative estimates for 1348 and 1349 put the deaths at about one third of the population of the whole country.
+The figures your lesson gives are these. At the peak of the outbreak, 7,000 people a week were dying. Across the city, over 100,000 people died in all, which was about a fifth of London's population. For comparison, conservative estimates for 1348 and 1349 put the deaths at about one third of the population of the whole country.
 Historians today say that this was bubonic plague, caused by bacteria that travelled in fleas living on black rats, and the rats came in on ships. Nobody in 1665 knew any of that, and it is worth saying out loud: the people you are about to study were not stupid. They were working with the explanations they had.
 Tip: Give the 1665 figures as the city of London's, not the country's. Mixing up a London figure with a national one is an easy mark to lose.</a:t>
             </a:r>
